--- a/docs/Презентация_Большие_Вызовы_2026_Ковалева_Алиса.pptx
+++ b/docs/Презентация_Большие_Вызовы_2026_Ковалева_Алиса.pptx
@@ -4625,7 +4625,7 @@
               </a:defRPr>
             </a:pPr>
             <a:r>
-              <a:t>Ковалева Алиса Ивановна (ezicvtumane@gmail.com) | Научный руководитель: Ковалев Иван Викторович</a:t>
+              <a:t>Ковалева Алиса Ивановна (v1m@mail.ru) | Научный руководитель: Ковалев Иван Викторович</a:t>
             </a:r>
           </a:p>
         </p:txBody>
